--- a/P3/Monitoring_PostgreSQL_prezentacija.pptx
+++ b/P3/Monitoring_PostgreSQL_prezentacija.pptx
@@ -12,8 +12,8 @@
     <p:sldId id="257" r:id="rId3"/>
     <p:sldId id="258" r:id="rId4"/>
     <p:sldId id="259" r:id="rId5"/>
-    <p:sldId id="260" r:id="rId6"/>
-    <p:sldId id="261" r:id="rId7"/>
+    <p:sldId id="261" r:id="rId6"/>
+    <p:sldId id="260" r:id="rId7"/>
     <p:sldId id="262" r:id="rId8"/>
     <p:sldId id="263" r:id="rId9"/>
     <p:sldId id="264" r:id="rId10"/>
@@ -1017,7 +1017,7 @@
           <a:p>
             <a:r>
               <a:rPr lang="en-US" dirty="0"/>
-              <a:t>Četiri razloga zašto monitoring nije luksuz nego nužnost. Ključni prelaz: sa reaktivnog na proaktivan pristup.</a:t>
+              <a:t>Univerzalni set kategorija metrika. Dele se na nivo OS/servera i nivo DBMS-a. Cache hit ratio i locks su posebno indikativni za probleme.</a:t>
             </a:r>
           </a:p>
         </p:txBody>
@@ -1104,7 +1104,7 @@
           <a:p>
             <a:r>
               <a:rPr lang="en-US" dirty="0"/>
-              <a:t>Univerzalni set kategorija metrika. Dele se na nivo OS/servera i nivo DBMS-a. Cache hit ratio i locks su posebno indikativni za probleme.</a:t>
+              <a:t>Četiri razloga zašto monitoring nije luksuz nego nužnost. Ključni prelaz: sa reaktivnog na proaktivan pristup.</a:t>
             </a:r>
           </a:p>
         </p:txBody>
@@ -3582,6 +3582,17 @@
               <a:buNone/>
             </a:pPr>
             <a:r>
+              <a:rPr lang="en-US" sz="1600" b="1" dirty="0" err="1">
+                <a:solidFill>
+                  <a:srgbClr val="336791"/>
+                </a:solidFill>
+                <a:latin typeface="Cambria" pitchFamily="34" charset="0"/>
+                <a:ea typeface="Cambria" pitchFamily="34" charset="-122"/>
+                <a:cs typeface="Cambria" pitchFamily="34" charset="-120"/>
+              </a:rPr>
+              <a:t>pg_stat_statements</a:t>
+            </a:r>
+            <a:r>
               <a:rPr lang="en-US" sz="1600" b="1" dirty="0">
                 <a:solidFill>
                   <a:srgbClr val="336791"/>
@@ -3590,7 +3601,18 @@
                 <a:ea typeface="Cambria" pitchFamily="34" charset="-122"/>
                 <a:cs typeface="Cambria" pitchFamily="34" charset="-120"/>
               </a:rPr>
-              <a:t>pg_stat_statements</a:t>
+              <a:t> </a:t>
+            </a:r>
+            <a:r>
+              <a:rPr lang="en-US" sz="1600" b="1" dirty="0" err="1">
+                <a:solidFill>
+                  <a:srgbClr val="336791"/>
+                </a:solidFill>
+                <a:latin typeface="Cambria" pitchFamily="34" charset="0"/>
+                <a:ea typeface="Cambria" pitchFamily="34" charset="-122"/>
+                <a:cs typeface="Cambria" pitchFamily="34" charset="-120"/>
+              </a:rPr>
+              <a:t>ekstenzija</a:t>
             </a:r>
             <a:endParaRPr lang="en-US" sz="1600" dirty="0"/>
           </a:p>
@@ -4086,9 +4108,74 @@
                 <a:ea typeface="Calibri" pitchFamily="34" charset="-122"/>
                 <a:cs typeface="Calibri" pitchFamily="34" charset="-120"/>
               </a:rPr>
-              <a:t>Monitoring i observability omogućavaju prelazak sa reaktivnog na proaktivan pristup upravljanju bazama.</a:t>
-            </a:r>
-            <a:endParaRPr lang="en-US" sz="1600" dirty="0"/>
+              <a:t>Monitoring i observability omogućavaju prelazak sa reaktivnog na proaktivan pristup </a:t>
+            </a:r>
+            <a:r>
+              <a:rPr lang="en-US" sz="1600" dirty="0" err="1">
+                <a:solidFill>
+                  <a:srgbClr val="E4E9F1"/>
+                </a:solidFill>
+                <a:latin typeface="Calibri" pitchFamily="34" charset="0"/>
+                <a:ea typeface="Calibri" pitchFamily="34" charset="-122"/>
+                <a:cs typeface="Calibri" pitchFamily="34" charset="-120"/>
+              </a:rPr>
+              <a:t>upravljanju</a:t>
+            </a:r>
+            <a:r>
+              <a:rPr lang="en-US" sz="1600" dirty="0">
+                <a:solidFill>
+                  <a:srgbClr val="E4E9F1"/>
+                </a:solidFill>
+                <a:latin typeface="Calibri" pitchFamily="34" charset="0"/>
+                <a:ea typeface="Calibri" pitchFamily="34" charset="-122"/>
+                <a:cs typeface="Calibri" pitchFamily="34" charset="-120"/>
+              </a:rPr>
+              <a:t> </a:t>
+            </a:r>
+            <a:r>
+              <a:rPr lang="en-US" sz="1600" dirty="0" err="1">
+                <a:solidFill>
+                  <a:srgbClr val="E4E9F1"/>
+                </a:solidFill>
+                <a:latin typeface="Calibri" pitchFamily="34" charset="0"/>
+                <a:ea typeface="Calibri" pitchFamily="34" charset="-122"/>
+                <a:cs typeface="Calibri" pitchFamily="34" charset="-120"/>
+              </a:rPr>
+              <a:t>bazama</a:t>
+            </a:r>
+            <a:r>
+              <a:rPr lang="en-US" sz="1600" dirty="0">
+                <a:solidFill>
+                  <a:srgbClr val="E4E9F1"/>
+                </a:solidFill>
+                <a:latin typeface="Calibri" pitchFamily="34" charset="0"/>
+                <a:ea typeface="Calibri" pitchFamily="34" charset="-122"/>
+                <a:cs typeface="Calibri" pitchFamily="34" charset="-120"/>
+              </a:rPr>
+              <a:t> </a:t>
+            </a:r>
+            <a:r>
+              <a:rPr lang="en-US" sz="1600" dirty="0" err="1">
+                <a:solidFill>
+                  <a:srgbClr val="E4E9F1"/>
+                </a:solidFill>
+                <a:latin typeface="Calibri" pitchFamily="34" charset="0"/>
+                <a:ea typeface="Calibri" pitchFamily="34" charset="-122"/>
+                <a:cs typeface="Calibri" pitchFamily="34" charset="-120"/>
+              </a:rPr>
+              <a:t>podataka</a:t>
+            </a:r>
+            <a:r>
+              <a:rPr lang="en-US" sz="1600" dirty="0">
+                <a:solidFill>
+                  <a:srgbClr val="E4E9F1"/>
+                </a:solidFill>
+                <a:latin typeface="Calibri" pitchFamily="34" charset="0"/>
+                <a:ea typeface="Calibri" pitchFamily="34" charset="-122"/>
+                <a:cs typeface="Calibri" pitchFamily="34" charset="-120"/>
+              </a:rPr>
+              <a:t>.</a:t>
+            </a:r>
           </a:p>
           <a:p>
             <a:pPr marL="254000" indent="-254000">
@@ -4101,6 +4188,19 @@
               <a:buSzPct val="100000"/>
               <a:buChar char="•"/>
             </a:pPr>
+            <a:endParaRPr lang="en-US" sz="1600" dirty="0"/>
+          </a:p>
+          <a:p>
+            <a:pPr marL="254000" indent="-254000">
+              <a:lnSpc>
+                <a:spcPct val="115000"/>
+              </a:lnSpc>
+              <a:spcAft>
+                <a:spcPts val="1000"/>
+              </a:spcAft>
+              <a:buSzPct val="100000"/>
+              <a:buChar char="•"/>
+            </a:pPr>
             <a:r>
               <a:rPr lang="en-US" sz="1600" dirty="0">
                 <a:solidFill>
@@ -4113,55 +4213,6 @@
               <a:t>PostgreSQL ima bogat i zreo skup ugrađenih mehanizama koji pokrivaju sva tri stuba observability-ja.</a:t>
             </a:r>
             <a:endParaRPr lang="en-US" sz="1600" dirty="0"/>
-          </a:p>
-          <a:p>
-            <a:pPr marL="254000" indent="-254000">
-              <a:lnSpc>
-                <a:spcPct val="115000"/>
-              </a:lnSpc>
-              <a:buSzPct val="100000"/>
-              <a:buChar char="•"/>
-            </a:pPr>
-            <a:r>
-              <a:rPr lang="en-US" sz="1600" dirty="0">
-                <a:solidFill>
-                  <a:srgbClr val="E4E9F1"/>
-                </a:solidFill>
-                <a:latin typeface="Calibri" pitchFamily="34" charset="0"/>
-                <a:ea typeface="Calibri" pitchFamily="34" charset="-122"/>
-                <a:cs typeface="Calibri" pitchFamily="34" charset="-120"/>
-              </a:rPr>
-              <a:t>Praktični deo pokazao je dijagnozu sporog upita (EXPLAIN ANALYZE), ~276× poboljšanje nakon indeksa i kontinuirano vizuelno praćenje kroz Prometheus i Grafanu.</a:t>
-            </a:r>
-            <a:endParaRPr lang="en-US" sz="1600" dirty="0"/>
-          </a:p>
-        </p:txBody>
-      </p:sp>
-      <p:sp>
-        <p:nvSpPr>
-          <p:cNvPr id="4" name="Text 2"/>
-          <p:cNvSpPr/>
-          <p:nvPr/>
-        </p:nvSpPr>
-        <p:spPr>
-          <a:xfrm>
-            <a:off x="640080" y="4434840"/>
-            <a:ext cx="7863840" cy="457200"/>
-          </a:xfrm>
-          <a:prstGeom prst="rect">
-            <a:avLst/>
-          </a:prstGeom>
-          <a:noFill/>
-          <a:ln/>
-        </p:spPr>
-        <p:txBody>
-          <a:bodyPr wrap="square" lIns="0" tIns="0" rIns="0" bIns="0" rtlCol="0" anchor="ctr"/>
-          <a:lstStyle/>
-          <a:p>
-            <a:pPr marL="0" indent="0">
-              <a:buNone/>
-            </a:pPr>
-            <a:endParaRPr lang="en-US" sz="1800" dirty="0"/>
           </a:p>
         </p:txBody>
       </p:sp>
@@ -4218,7 +4269,7 @@
         </p:nvSpPr>
         <p:spPr>
           <a:xfrm>
-            <a:off x="700592" y="3242085"/>
+            <a:off x="640080" y="2205990"/>
             <a:ext cx="7863840" cy="731520"/>
           </a:xfrm>
           <a:prstGeom prst="rect">
@@ -4231,7 +4282,7 @@
           <a:bodyPr wrap="square" lIns="0" tIns="0" rIns="0" bIns="0" rtlCol="0" anchor="ctr"/>
           <a:lstStyle/>
           <a:p>
-            <a:pPr marL="0" indent="0" algn="r">
+            <a:pPr marL="0" indent="0" algn="ctr">
               <a:buNone/>
             </a:pPr>
             <a:r>
@@ -5590,6 +5641,507 @@
 
 <file path=ppt/slides/slide5.xml><?xml version="1.0" encoding="utf-8"?>
 <p:sld xmlns:a="http://schemas.openxmlformats.org/drawingml/2006/main" xmlns:r="http://schemas.openxmlformats.org/officeDocument/2006/relationships" xmlns:p="http://schemas.openxmlformats.org/presentationml/2006/main">
+  <p:cSld name="Slide 6">
+    <p:bg>
+      <p:bgPr>
+        <a:solidFill>
+          <a:srgbClr val="FFFFFF"/>
+        </a:solidFill>
+        <a:effectLst/>
+      </p:bgPr>
+    </p:bg>
+    <p:spTree>
+      <p:nvGrpSpPr>
+        <p:cNvPr id="1" name=""/>
+        <p:cNvGrpSpPr/>
+        <p:nvPr/>
+      </p:nvGrpSpPr>
+      <p:grpSpPr>
+        <a:xfrm>
+          <a:off x="0" y="0"/>
+          <a:ext cx="0" cy="0"/>
+          <a:chOff x="0" y="0"/>
+          <a:chExt cx="0" cy="0"/>
+        </a:xfrm>
+      </p:grpSpPr>
+      <p:sp>
+        <p:nvSpPr>
+          <p:cNvPr id="2" name="Text 0"/>
+          <p:cNvSpPr/>
+          <p:nvPr/>
+        </p:nvSpPr>
+        <p:spPr>
+          <a:xfrm>
+            <a:off x="548640" y="365760"/>
+            <a:ext cx="8046720" cy="685800"/>
+          </a:xfrm>
+          <a:prstGeom prst="rect">
+            <a:avLst/>
+          </a:prstGeom>
+          <a:noFill/>
+          <a:ln/>
+        </p:spPr>
+        <p:txBody>
+          <a:bodyPr wrap="square" lIns="0" tIns="0" rIns="0" bIns="0" rtlCol="0" anchor="ctr"/>
+          <a:lstStyle/>
+          <a:p>
+            <a:pPr marL="0" indent="0" algn="l">
+              <a:buNone/>
+            </a:pPr>
+            <a:r>
+              <a:rPr lang="en-US" sz="2800" b="1" dirty="0">
+                <a:solidFill>
+                  <a:srgbClr val="2B3A55"/>
+                </a:solidFill>
+                <a:latin typeface="Cambria" pitchFamily="34" charset="0"/>
+                <a:ea typeface="Cambria" pitchFamily="34" charset="-122"/>
+                <a:cs typeface="Cambria" pitchFamily="34" charset="-120"/>
+              </a:rPr>
+              <a:t>Ključne metrike u monitoringu</a:t>
+            </a:r>
+            <a:endParaRPr lang="en-US" sz="2800" dirty="0"/>
+          </a:p>
+        </p:txBody>
+      </p:sp>
+      <p:sp>
+        <p:nvSpPr>
+          <p:cNvPr id="3" name="Text 1"/>
+          <p:cNvSpPr/>
+          <p:nvPr/>
+        </p:nvSpPr>
+        <p:spPr>
+          <a:xfrm>
+            <a:off x="548640" y="4526280"/>
+            <a:ext cx="8046720" cy="320040"/>
+          </a:xfrm>
+          <a:prstGeom prst="rect">
+            <a:avLst/>
+          </a:prstGeom>
+          <a:noFill/>
+          <a:ln/>
+        </p:spPr>
+        <p:txBody>
+          <a:bodyPr wrap="square" lIns="0" tIns="0" rIns="0" bIns="0" rtlCol="0" anchor="ctr"/>
+          <a:lstStyle/>
+          <a:p>
+            <a:pPr marL="0" indent="0" algn="r">
+              <a:buNone/>
+            </a:pPr>
+            <a:r>
+              <a:rPr lang="en-US" sz="1000" dirty="0">
+                <a:solidFill>
+                  <a:srgbClr val="6B7280"/>
+                </a:solidFill>
+                <a:latin typeface="Calibri" pitchFamily="34" charset="0"/>
+                <a:ea typeface="Calibri" pitchFamily="34" charset="-122"/>
+                <a:cs typeface="Calibri" pitchFamily="34" charset="-120"/>
+              </a:rPr>
+              <a:t>6</a:t>
+            </a:r>
+            <a:endParaRPr lang="en-US" sz="1000" dirty="0"/>
+          </a:p>
+        </p:txBody>
+      </p:sp>
+      <p:sp>
+        <p:nvSpPr>
+          <p:cNvPr id="4" name="Text 2"/>
+          <p:cNvSpPr/>
+          <p:nvPr/>
+        </p:nvSpPr>
+        <p:spPr>
+          <a:xfrm>
+            <a:off x="548640" y="1188720"/>
+            <a:ext cx="8046720" cy="411480"/>
+          </a:xfrm>
+          <a:prstGeom prst="rect">
+            <a:avLst/>
+          </a:prstGeom>
+          <a:noFill/>
+          <a:ln/>
+        </p:spPr>
+        <p:txBody>
+          <a:bodyPr wrap="square" lIns="0" tIns="0" rIns="0" bIns="0" rtlCol="0" anchor="ctr"/>
+          <a:lstStyle/>
+          <a:p>
+            <a:pPr marL="285750" indent="-285750">
+              <a:buFont typeface="Arial" panose="020B0604020202020204" pitchFamily="34" charset="0"/>
+              <a:buChar char="•"/>
+            </a:pPr>
+            <a:r>
+              <a:rPr lang="en-US" sz="1400" dirty="0">
+                <a:latin typeface="Calibri" pitchFamily="34" charset="0"/>
+                <a:ea typeface="Calibri" pitchFamily="34" charset="-122"/>
+                <a:cs typeface="Calibri" pitchFamily="34" charset="-120"/>
+              </a:rPr>
+              <a:t>Bez obzira na konkretan DBMS, prati se sličan skup kategorija — na nivou servera i na nivou samog DBMS-a:</a:t>
+            </a:r>
+            <a:endParaRPr lang="en-US" sz="1400" dirty="0"/>
+          </a:p>
+        </p:txBody>
+      </p:sp>
+      <p:sp>
+        <p:nvSpPr>
+          <p:cNvPr id="6" name="Text 4"/>
+          <p:cNvSpPr/>
+          <p:nvPr/>
+        </p:nvSpPr>
+        <p:spPr>
+          <a:xfrm>
+            <a:off x="896112" y="1645920"/>
+            <a:ext cx="3657600" cy="502920"/>
+          </a:xfrm>
+          <a:prstGeom prst="rect">
+            <a:avLst/>
+          </a:prstGeom>
+          <a:noFill/>
+          <a:ln/>
+        </p:spPr>
+        <p:txBody>
+          <a:bodyPr wrap="square" lIns="0" tIns="0" rIns="0" bIns="0" rtlCol="0" anchor="ctr"/>
+          <a:lstStyle/>
+          <a:p>
+            <a:pPr marL="0" indent="0">
+              <a:buNone/>
+            </a:pPr>
+            <a:r>
+              <a:rPr lang="en-US" sz="1350" b="1" dirty="0">
+                <a:solidFill>
+                  <a:srgbClr val="2B3A55"/>
+                </a:solidFill>
+                <a:latin typeface="Calibri" pitchFamily="34" charset="0"/>
+                <a:ea typeface="Calibri" pitchFamily="34" charset="-122"/>
+                <a:cs typeface="Calibri" pitchFamily="34" charset="-120"/>
+              </a:rPr>
+              <a:t>Iskorišćenost resursa  </a:t>
+            </a:r>
+            <a:r>
+              <a:rPr lang="en-US" sz="1350" dirty="0">
+                <a:latin typeface="Calibri" pitchFamily="34" charset="0"/>
+                <a:ea typeface="Calibri" pitchFamily="34" charset="-122"/>
+                <a:cs typeface="Calibri" pitchFamily="34" charset="-120"/>
+              </a:rPr>
+              <a:t>— CPU, memorija, disk I/O</a:t>
+            </a:r>
+            <a:endParaRPr lang="en-US" sz="1350" dirty="0"/>
+          </a:p>
+        </p:txBody>
+      </p:sp>
+      <p:sp>
+        <p:nvSpPr>
+          <p:cNvPr id="8" name="Text 6"/>
+          <p:cNvSpPr/>
+          <p:nvPr/>
+        </p:nvSpPr>
+        <p:spPr>
+          <a:xfrm>
+            <a:off x="896112" y="2359152"/>
+            <a:ext cx="3657600" cy="502920"/>
+          </a:xfrm>
+          <a:prstGeom prst="rect">
+            <a:avLst/>
+          </a:prstGeom>
+          <a:noFill/>
+          <a:ln/>
+        </p:spPr>
+        <p:txBody>
+          <a:bodyPr wrap="square" lIns="0" tIns="0" rIns="0" bIns="0" rtlCol="0" anchor="ctr"/>
+          <a:lstStyle/>
+          <a:p>
+            <a:pPr marL="0" indent="0">
+              <a:buNone/>
+            </a:pPr>
+            <a:r>
+              <a:rPr lang="en-US" sz="1350" b="1" dirty="0">
+                <a:solidFill>
+                  <a:srgbClr val="2B3A55"/>
+                </a:solidFill>
+                <a:latin typeface="Calibri" pitchFamily="34" charset="0"/>
+                <a:ea typeface="Calibri" pitchFamily="34" charset="-122"/>
+                <a:cs typeface="Calibri" pitchFamily="34" charset="-120"/>
+              </a:rPr>
+              <a:t>Konekcije  </a:t>
+            </a:r>
+            <a:r>
+              <a:rPr lang="en-US" sz="1350" dirty="0">
+                <a:latin typeface="Calibri" pitchFamily="34" charset="0"/>
+                <a:ea typeface="Calibri" pitchFamily="34" charset="-122"/>
+                <a:cs typeface="Calibri" pitchFamily="34" charset="-120"/>
+              </a:rPr>
+              <a:t>— aktivne i idle konekcije</a:t>
+            </a:r>
+            <a:endParaRPr lang="en-US" sz="1350" dirty="0"/>
+          </a:p>
+        </p:txBody>
+      </p:sp>
+      <p:sp>
+        <p:nvSpPr>
+          <p:cNvPr id="10" name="Text 8"/>
+          <p:cNvSpPr/>
+          <p:nvPr/>
+        </p:nvSpPr>
+        <p:spPr>
+          <a:xfrm>
+            <a:off x="896112" y="3072384"/>
+            <a:ext cx="3657600" cy="502920"/>
+          </a:xfrm>
+          <a:prstGeom prst="rect">
+            <a:avLst/>
+          </a:prstGeom>
+          <a:noFill/>
+          <a:ln/>
+        </p:spPr>
+        <p:txBody>
+          <a:bodyPr wrap="square" lIns="0" tIns="0" rIns="0" bIns="0" rtlCol="0" anchor="ctr"/>
+          <a:lstStyle/>
+          <a:p>
+            <a:pPr marL="0" indent="0">
+              <a:buNone/>
+            </a:pPr>
+            <a:r>
+              <a:rPr lang="en-US" sz="1350" b="1" dirty="0">
+                <a:solidFill>
+                  <a:srgbClr val="2B3A55"/>
+                </a:solidFill>
+                <a:latin typeface="Calibri" pitchFamily="34" charset="0"/>
+                <a:ea typeface="Calibri" pitchFamily="34" charset="-122"/>
+                <a:cs typeface="Calibri" pitchFamily="34" charset="-120"/>
+              </a:rPr>
+              <a:t>Latencija i propusnost  </a:t>
+            </a:r>
+            <a:r>
+              <a:rPr lang="en-US" sz="1350" dirty="0">
+                <a:latin typeface="Calibri" pitchFamily="34" charset="0"/>
+                <a:ea typeface="Calibri" pitchFamily="34" charset="-122"/>
+                <a:cs typeface="Calibri" pitchFamily="34" charset="-120"/>
+              </a:rPr>
+              <a:t>— vreme upita, transakcije/s (TPS)</a:t>
+            </a:r>
+            <a:endParaRPr lang="en-US" sz="1350" dirty="0"/>
+          </a:p>
+        </p:txBody>
+      </p:sp>
+      <p:sp>
+        <p:nvSpPr>
+          <p:cNvPr id="12" name="Text 10"/>
+          <p:cNvSpPr/>
+          <p:nvPr/>
+        </p:nvSpPr>
+        <p:spPr>
+          <a:xfrm>
+            <a:off x="896112" y="3785616"/>
+            <a:ext cx="3657600" cy="502920"/>
+          </a:xfrm>
+          <a:prstGeom prst="rect">
+            <a:avLst/>
+          </a:prstGeom>
+          <a:noFill/>
+          <a:ln/>
+        </p:spPr>
+        <p:txBody>
+          <a:bodyPr wrap="square" lIns="0" tIns="0" rIns="0" bIns="0" rtlCol="0" anchor="ctr"/>
+          <a:lstStyle/>
+          <a:p>
+            <a:pPr marL="0" indent="0">
+              <a:buNone/>
+            </a:pPr>
+            <a:r>
+              <a:rPr lang="en-US" sz="1350" b="1" dirty="0">
+                <a:solidFill>
+                  <a:srgbClr val="2B3A55"/>
+                </a:solidFill>
+                <a:latin typeface="Calibri" pitchFamily="34" charset="0"/>
+                <a:ea typeface="Calibri" pitchFamily="34" charset="-122"/>
+                <a:cs typeface="Calibri" pitchFamily="34" charset="-120"/>
+              </a:rPr>
+              <a:t>Cache hit ratio  </a:t>
+            </a:r>
+            <a:r>
+              <a:rPr lang="en-US" sz="1350" dirty="0">
+                <a:latin typeface="Calibri" pitchFamily="34" charset="0"/>
+                <a:ea typeface="Calibri" pitchFamily="34" charset="-122"/>
+                <a:cs typeface="Calibri" pitchFamily="34" charset="-120"/>
+              </a:rPr>
+              <a:t>— % čitanja iz keša vs. sa diska</a:t>
+            </a:r>
+            <a:endParaRPr lang="en-US" sz="1350" dirty="0"/>
+          </a:p>
+        </p:txBody>
+      </p:sp>
+      <p:sp>
+        <p:nvSpPr>
+          <p:cNvPr id="14" name="Text 12"/>
+          <p:cNvSpPr/>
+          <p:nvPr/>
+        </p:nvSpPr>
+        <p:spPr>
+          <a:xfrm>
+            <a:off x="4919472" y="1645920"/>
+            <a:ext cx="3657600" cy="502920"/>
+          </a:xfrm>
+          <a:prstGeom prst="rect">
+            <a:avLst/>
+          </a:prstGeom>
+          <a:noFill/>
+          <a:ln/>
+        </p:spPr>
+        <p:txBody>
+          <a:bodyPr wrap="square" lIns="0" tIns="0" rIns="0" bIns="0" rtlCol="0" anchor="ctr"/>
+          <a:lstStyle/>
+          <a:p>
+            <a:pPr marL="0" indent="0">
+              <a:buNone/>
+            </a:pPr>
+            <a:r>
+              <a:rPr lang="en-US" sz="1350" b="1" dirty="0">
+                <a:solidFill>
+                  <a:srgbClr val="2B3A55"/>
+                </a:solidFill>
+                <a:latin typeface="Calibri" pitchFamily="34" charset="0"/>
+                <a:ea typeface="Calibri" pitchFamily="34" charset="-122"/>
+                <a:cs typeface="Calibri" pitchFamily="34" charset="-120"/>
+              </a:rPr>
+              <a:t>Zaključavanja (locks)  </a:t>
+            </a:r>
+            <a:r>
+              <a:rPr lang="en-US" sz="1350" dirty="0">
+                <a:latin typeface="Calibri" pitchFamily="34" charset="0"/>
+                <a:ea typeface="Calibri" pitchFamily="34" charset="-122"/>
+                <a:cs typeface="Calibri" pitchFamily="34" charset="-120"/>
+              </a:rPr>
+              <a:t>— sesije koje čekaju na bravu</a:t>
+            </a:r>
+            <a:endParaRPr lang="en-US" sz="1350" dirty="0"/>
+          </a:p>
+        </p:txBody>
+      </p:sp>
+      <p:sp>
+        <p:nvSpPr>
+          <p:cNvPr id="16" name="Text 14"/>
+          <p:cNvSpPr/>
+          <p:nvPr/>
+        </p:nvSpPr>
+        <p:spPr>
+          <a:xfrm>
+            <a:off x="4919472" y="2359152"/>
+            <a:ext cx="3657600" cy="502920"/>
+          </a:xfrm>
+          <a:prstGeom prst="rect">
+            <a:avLst/>
+          </a:prstGeom>
+          <a:noFill/>
+          <a:ln/>
+        </p:spPr>
+        <p:txBody>
+          <a:bodyPr wrap="square" lIns="0" tIns="0" rIns="0" bIns="0" rtlCol="0" anchor="ctr"/>
+          <a:lstStyle/>
+          <a:p>
+            <a:pPr marL="0" indent="0">
+              <a:buNone/>
+            </a:pPr>
+            <a:r>
+              <a:rPr lang="en-US" sz="1350" b="1" dirty="0">
+                <a:solidFill>
+                  <a:srgbClr val="2B3A55"/>
+                </a:solidFill>
+                <a:latin typeface="Calibri" pitchFamily="34" charset="0"/>
+                <a:ea typeface="Calibri" pitchFamily="34" charset="-122"/>
+                <a:cs typeface="Calibri" pitchFamily="34" charset="-120"/>
+              </a:rPr>
+              <a:t>Kašnjenje replikacije  </a:t>
+            </a:r>
+            <a:r>
+              <a:rPr lang="en-US" sz="1350" dirty="0">
+                <a:latin typeface="Calibri" pitchFamily="34" charset="0"/>
+                <a:ea typeface="Calibri" pitchFamily="34" charset="-122"/>
+                <a:cs typeface="Calibri" pitchFamily="34" charset="-120"/>
+              </a:rPr>
+              <a:t>— u distr. I </a:t>
+            </a:r>
+            <a:r>
+              <a:rPr lang="en-US" sz="1350" dirty="0" err="1">
+                <a:latin typeface="Calibri" pitchFamily="34" charset="0"/>
+                <a:ea typeface="Calibri" pitchFamily="34" charset="-122"/>
+                <a:cs typeface="Calibri" pitchFamily="34" charset="-120"/>
+              </a:rPr>
+              <a:t>replikovanim</a:t>
+            </a:r>
+            <a:r>
+              <a:rPr lang="en-US" sz="1350" dirty="0">
+                <a:latin typeface="Calibri" pitchFamily="34" charset="0"/>
+                <a:ea typeface="Calibri" pitchFamily="34" charset="-122"/>
+                <a:cs typeface="Calibri" pitchFamily="34" charset="-120"/>
+              </a:rPr>
+              <a:t> </a:t>
+            </a:r>
+            <a:r>
+              <a:rPr lang="en-US" sz="1350" dirty="0" err="1">
+                <a:latin typeface="Calibri" pitchFamily="34" charset="0"/>
+                <a:ea typeface="Calibri" pitchFamily="34" charset="-122"/>
+                <a:cs typeface="Calibri" pitchFamily="34" charset="-120"/>
+              </a:rPr>
+              <a:t>sistemima</a:t>
+            </a:r>
+            <a:endParaRPr lang="en-US" sz="1350" dirty="0"/>
+          </a:p>
+        </p:txBody>
+      </p:sp>
+      <p:sp>
+        <p:nvSpPr>
+          <p:cNvPr id="18" name="Text 16"/>
+          <p:cNvSpPr/>
+          <p:nvPr/>
+        </p:nvSpPr>
+        <p:spPr>
+          <a:xfrm>
+            <a:off x="4919472" y="3072384"/>
+            <a:ext cx="3657600" cy="502920"/>
+          </a:xfrm>
+          <a:prstGeom prst="rect">
+            <a:avLst/>
+          </a:prstGeom>
+          <a:noFill/>
+          <a:ln/>
+        </p:spPr>
+        <p:txBody>
+          <a:bodyPr wrap="square" lIns="0" tIns="0" rIns="0" bIns="0" rtlCol="0" anchor="ctr"/>
+          <a:lstStyle/>
+          <a:p>
+            <a:pPr marL="0" indent="0">
+              <a:buNone/>
+            </a:pPr>
+            <a:r>
+              <a:rPr lang="en-US" sz="1350" b="1" dirty="0">
+                <a:solidFill>
+                  <a:srgbClr val="2B3A55"/>
+                </a:solidFill>
+                <a:latin typeface="Calibri" pitchFamily="34" charset="0"/>
+                <a:ea typeface="Calibri" pitchFamily="34" charset="-122"/>
+                <a:cs typeface="Calibri" pitchFamily="34" charset="-120"/>
+              </a:rPr>
+              <a:t>Stopa grešaka  </a:t>
+            </a:r>
+            <a:r>
+              <a:rPr lang="en-US" sz="1350" dirty="0">
+                <a:latin typeface="Calibri" pitchFamily="34" charset="0"/>
+                <a:ea typeface="Calibri" pitchFamily="34" charset="-122"/>
+                <a:cs typeface="Calibri" pitchFamily="34" charset="-120"/>
+              </a:rPr>
+              <a:t>— neuspele transakcije, deadlock-ovi</a:t>
+            </a:r>
+            <a:endParaRPr lang="en-US" sz="1350" dirty="0"/>
+          </a:p>
+        </p:txBody>
+      </p:sp>
+    </p:spTree>
+  </p:cSld>
+  <p:clrMapOvr>
+    <a:masterClrMapping/>
+  </p:clrMapOvr>
+</p:sld>
+</file>
+
+<file path=ppt/slides/slide6.xml><?xml version="1.0" encoding="utf-8"?>
+<p:sld xmlns:a="http://schemas.openxmlformats.org/drawingml/2006/main" xmlns:r="http://schemas.openxmlformats.org/officeDocument/2006/relationships" xmlns:p="http://schemas.openxmlformats.org/presentationml/2006/main">
   <p:cSld name="Slide 5">
     <p:bg>
       <p:bgPr>
@@ -6100,483 +6652,6 @@
               <a:t>Logovi pristupa otkrivaju neuobičajene obrasce, neuspele autentifikacije i deo su audit sistema.</a:t>
             </a:r>
             <a:endParaRPr lang="en-US" sz="1250" dirty="0"/>
-          </a:p>
-        </p:txBody>
-      </p:sp>
-    </p:spTree>
-  </p:cSld>
-  <p:clrMapOvr>
-    <a:masterClrMapping/>
-  </p:clrMapOvr>
-</p:sld>
-</file>
-
-<file path=ppt/slides/slide6.xml><?xml version="1.0" encoding="utf-8"?>
-<p:sld xmlns:a="http://schemas.openxmlformats.org/drawingml/2006/main" xmlns:r="http://schemas.openxmlformats.org/officeDocument/2006/relationships" xmlns:p="http://schemas.openxmlformats.org/presentationml/2006/main">
-  <p:cSld name="Slide 6">
-    <p:bg>
-      <p:bgPr>
-        <a:solidFill>
-          <a:srgbClr val="FFFFFF"/>
-        </a:solidFill>
-        <a:effectLst/>
-      </p:bgPr>
-    </p:bg>
-    <p:spTree>
-      <p:nvGrpSpPr>
-        <p:cNvPr id="1" name=""/>
-        <p:cNvGrpSpPr/>
-        <p:nvPr/>
-      </p:nvGrpSpPr>
-      <p:grpSpPr>
-        <a:xfrm>
-          <a:off x="0" y="0"/>
-          <a:ext cx="0" cy="0"/>
-          <a:chOff x="0" y="0"/>
-          <a:chExt cx="0" cy="0"/>
-        </a:xfrm>
-      </p:grpSpPr>
-      <p:sp>
-        <p:nvSpPr>
-          <p:cNvPr id="2" name="Text 0"/>
-          <p:cNvSpPr/>
-          <p:nvPr/>
-        </p:nvSpPr>
-        <p:spPr>
-          <a:xfrm>
-            <a:off x="548640" y="365760"/>
-            <a:ext cx="8046720" cy="685800"/>
-          </a:xfrm>
-          <a:prstGeom prst="rect">
-            <a:avLst/>
-          </a:prstGeom>
-          <a:noFill/>
-          <a:ln/>
-        </p:spPr>
-        <p:txBody>
-          <a:bodyPr wrap="square" lIns="0" tIns="0" rIns="0" bIns="0" rtlCol="0" anchor="ctr"/>
-          <a:lstStyle/>
-          <a:p>
-            <a:pPr marL="0" indent="0" algn="l">
-              <a:buNone/>
-            </a:pPr>
-            <a:r>
-              <a:rPr lang="en-US" sz="2800" b="1" dirty="0">
-                <a:solidFill>
-                  <a:srgbClr val="2B3A55"/>
-                </a:solidFill>
-                <a:latin typeface="Cambria" pitchFamily="34" charset="0"/>
-                <a:ea typeface="Cambria" pitchFamily="34" charset="-122"/>
-                <a:cs typeface="Cambria" pitchFamily="34" charset="-120"/>
-              </a:rPr>
-              <a:t>Ključne metrike u monitoringu</a:t>
-            </a:r>
-            <a:endParaRPr lang="en-US" sz="2800" dirty="0"/>
-          </a:p>
-        </p:txBody>
-      </p:sp>
-      <p:sp>
-        <p:nvSpPr>
-          <p:cNvPr id="3" name="Text 1"/>
-          <p:cNvSpPr/>
-          <p:nvPr/>
-        </p:nvSpPr>
-        <p:spPr>
-          <a:xfrm>
-            <a:off x="548640" y="4526280"/>
-            <a:ext cx="8046720" cy="320040"/>
-          </a:xfrm>
-          <a:prstGeom prst="rect">
-            <a:avLst/>
-          </a:prstGeom>
-          <a:noFill/>
-          <a:ln/>
-        </p:spPr>
-        <p:txBody>
-          <a:bodyPr wrap="square" lIns="0" tIns="0" rIns="0" bIns="0" rtlCol="0" anchor="ctr"/>
-          <a:lstStyle/>
-          <a:p>
-            <a:pPr marL="0" indent="0" algn="r">
-              <a:buNone/>
-            </a:pPr>
-            <a:r>
-              <a:rPr lang="en-US" sz="1000" dirty="0">
-                <a:solidFill>
-                  <a:srgbClr val="6B7280"/>
-                </a:solidFill>
-                <a:latin typeface="Calibri" pitchFamily="34" charset="0"/>
-                <a:ea typeface="Calibri" pitchFamily="34" charset="-122"/>
-                <a:cs typeface="Calibri" pitchFamily="34" charset="-120"/>
-              </a:rPr>
-              <a:t>6</a:t>
-            </a:r>
-            <a:endParaRPr lang="en-US" sz="1000" dirty="0"/>
-          </a:p>
-        </p:txBody>
-      </p:sp>
-      <p:sp>
-        <p:nvSpPr>
-          <p:cNvPr id="4" name="Text 2"/>
-          <p:cNvSpPr/>
-          <p:nvPr/>
-        </p:nvSpPr>
-        <p:spPr>
-          <a:xfrm>
-            <a:off x="548640" y="1188720"/>
-            <a:ext cx="8046720" cy="411480"/>
-          </a:xfrm>
-          <a:prstGeom prst="rect">
-            <a:avLst/>
-          </a:prstGeom>
-          <a:noFill/>
-          <a:ln/>
-        </p:spPr>
-        <p:txBody>
-          <a:bodyPr wrap="square" lIns="0" tIns="0" rIns="0" bIns="0" rtlCol="0" anchor="ctr"/>
-          <a:lstStyle/>
-          <a:p>
-            <a:pPr marL="285750" indent="-285750">
-              <a:buFont typeface="Arial" panose="020B0604020202020204" pitchFamily="34" charset="0"/>
-              <a:buChar char="•"/>
-            </a:pPr>
-            <a:r>
-              <a:rPr lang="en-US" sz="1400" dirty="0">
-                <a:latin typeface="Calibri" pitchFamily="34" charset="0"/>
-                <a:ea typeface="Calibri" pitchFamily="34" charset="-122"/>
-                <a:cs typeface="Calibri" pitchFamily="34" charset="-120"/>
-              </a:rPr>
-              <a:t>Bez obzira na konkretan DBMS, prati se sličan skup kategorija — na nivou servera i na nivou samog DBMS-a:</a:t>
-            </a:r>
-            <a:endParaRPr lang="en-US" sz="1400" dirty="0"/>
-          </a:p>
-        </p:txBody>
-      </p:sp>
-      <p:sp>
-        <p:nvSpPr>
-          <p:cNvPr id="6" name="Text 4"/>
-          <p:cNvSpPr/>
-          <p:nvPr/>
-        </p:nvSpPr>
-        <p:spPr>
-          <a:xfrm>
-            <a:off x="896112" y="1645920"/>
-            <a:ext cx="3657600" cy="502920"/>
-          </a:xfrm>
-          <a:prstGeom prst="rect">
-            <a:avLst/>
-          </a:prstGeom>
-          <a:noFill/>
-          <a:ln/>
-        </p:spPr>
-        <p:txBody>
-          <a:bodyPr wrap="square" lIns="0" tIns="0" rIns="0" bIns="0" rtlCol="0" anchor="ctr"/>
-          <a:lstStyle/>
-          <a:p>
-            <a:pPr marL="0" indent="0">
-              <a:buNone/>
-            </a:pPr>
-            <a:r>
-              <a:rPr lang="en-US" sz="1350" b="1" dirty="0">
-                <a:solidFill>
-                  <a:srgbClr val="2B3A55"/>
-                </a:solidFill>
-                <a:latin typeface="Calibri" pitchFamily="34" charset="0"/>
-                <a:ea typeface="Calibri" pitchFamily="34" charset="-122"/>
-                <a:cs typeface="Calibri" pitchFamily="34" charset="-120"/>
-              </a:rPr>
-              <a:t>Iskorišćenost resursa  </a:t>
-            </a:r>
-            <a:r>
-              <a:rPr lang="en-US" sz="1350" dirty="0">
-                <a:latin typeface="Calibri" pitchFamily="34" charset="0"/>
-                <a:ea typeface="Calibri" pitchFamily="34" charset="-122"/>
-                <a:cs typeface="Calibri" pitchFamily="34" charset="-120"/>
-              </a:rPr>
-              <a:t>— CPU, memorija, disk I/O</a:t>
-            </a:r>
-            <a:endParaRPr lang="en-US" sz="1350" dirty="0"/>
-          </a:p>
-        </p:txBody>
-      </p:sp>
-      <p:sp>
-        <p:nvSpPr>
-          <p:cNvPr id="8" name="Text 6"/>
-          <p:cNvSpPr/>
-          <p:nvPr/>
-        </p:nvSpPr>
-        <p:spPr>
-          <a:xfrm>
-            <a:off x="896112" y="2359152"/>
-            <a:ext cx="3657600" cy="502920"/>
-          </a:xfrm>
-          <a:prstGeom prst="rect">
-            <a:avLst/>
-          </a:prstGeom>
-          <a:noFill/>
-          <a:ln/>
-        </p:spPr>
-        <p:txBody>
-          <a:bodyPr wrap="square" lIns="0" tIns="0" rIns="0" bIns="0" rtlCol="0" anchor="ctr"/>
-          <a:lstStyle/>
-          <a:p>
-            <a:pPr marL="0" indent="0">
-              <a:buNone/>
-            </a:pPr>
-            <a:r>
-              <a:rPr lang="en-US" sz="1350" b="1" dirty="0">
-                <a:solidFill>
-                  <a:srgbClr val="2B3A55"/>
-                </a:solidFill>
-                <a:latin typeface="Calibri" pitchFamily="34" charset="0"/>
-                <a:ea typeface="Calibri" pitchFamily="34" charset="-122"/>
-                <a:cs typeface="Calibri" pitchFamily="34" charset="-120"/>
-              </a:rPr>
-              <a:t>Konekcije  </a:t>
-            </a:r>
-            <a:r>
-              <a:rPr lang="en-US" sz="1350" dirty="0">
-                <a:latin typeface="Calibri" pitchFamily="34" charset="0"/>
-                <a:ea typeface="Calibri" pitchFamily="34" charset="-122"/>
-                <a:cs typeface="Calibri" pitchFamily="34" charset="-120"/>
-              </a:rPr>
-              <a:t>— aktivne i idle konekcije</a:t>
-            </a:r>
-            <a:endParaRPr lang="en-US" sz="1350" dirty="0"/>
-          </a:p>
-        </p:txBody>
-      </p:sp>
-      <p:sp>
-        <p:nvSpPr>
-          <p:cNvPr id="10" name="Text 8"/>
-          <p:cNvSpPr/>
-          <p:nvPr/>
-        </p:nvSpPr>
-        <p:spPr>
-          <a:xfrm>
-            <a:off x="896112" y="3072384"/>
-            <a:ext cx="3657600" cy="502920"/>
-          </a:xfrm>
-          <a:prstGeom prst="rect">
-            <a:avLst/>
-          </a:prstGeom>
-          <a:noFill/>
-          <a:ln/>
-        </p:spPr>
-        <p:txBody>
-          <a:bodyPr wrap="square" lIns="0" tIns="0" rIns="0" bIns="0" rtlCol="0" anchor="ctr"/>
-          <a:lstStyle/>
-          <a:p>
-            <a:pPr marL="0" indent="0">
-              <a:buNone/>
-            </a:pPr>
-            <a:r>
-              <a:rPr lang="en-US" sz="1350" b="1" dirty="0">
-                <a:solidFill>
-                  <a:srgbClr val="2B3A55"/>
-                </a:solidFill>
-                <a:latin typeface="Calibri" pitchFamily="34" charset="0"/>
-                <a:ea typeface="Calibri" pitchFamily="34" charset="-122"/>
-                <a:cs typeface="Calibri" pitchFamily="34" charset="-120"/>
-              </a:rPr>
-              <a:t>Latencija i propusnost  </a:t>
-            </a:r>
-            <a:r>
-              <a:rPr lang="en-US" sz="1350" dirty="0">
-                <a:latin typeface="Calibri" pitchFamily="34" charset="0"/>
-                <a:ea typeface="Calibri" pitchFamily="34" charset="-122"/>
-                <a:cs typeface="Calibri" pitchFamily="34" charset="-120"/>
-              </a:rPr>
-              <a:t>— vreme upita, transakcije/s (TPS)</a:t>
-            </a:r>
-            <a:endParaRPr lang="en-US" sz="1350" dirty="0"/>
-          </a:p>
-        </p:txBody>
-      </p:sp>
-      <p:sp>
-        <p:nvSpPr>
-          <p:cNvPr id="12" name="Text 10"/>
-          <p:cNvSpPr/>
-          <p:nvPr/>
-        </p:nvSpPr>
-        <p:spPr>
-          <a:xfrm>
-            <a:off x="896112" y="3785616"/>
-            <a:ext cx="3657600" cy="502920"/>
-          </a:xfrm>
-          <a:prstGeom prst="rect">
-            <a:avLst/>
-          </a:prstGeom>
-          <a:noFill/>
-          <a:ln/>
-        </p:spPr>
-        <p:txBody>
-          <a:bodyPr wrap="square" lIns="0" tIns="0" rIns="0" bIns="0" rtlCol="0" anchor="ctr"/>
-          <a:lstStyle/>
-          <a:p>
-            <a:pPr marL="0" indent="0">
-              <a:buNone/>
-            </a:pPr>
-            <a:r>
-              <a:rPr lang="en-US" sz="1350" b="1" dirty="0">
-                <a:solidFill>
-                  <a:srgbClr val="2B3A55"/>
-                </a:solidFill>
-                <a:latin typeface="Calibri" pitchFamily="34" charset="0"/>
-                <a:ea typeface="Calibri" pitchFamily="34" charset="-122"/>
-                <a:cs typeface="Calibri" pitchFamily="34" charset="-120"/>
-              </a:rPr>
-              <a:t>Cache hit ratio  </a:t>
-            </a:r>
-            <a:r>
-              <a:rPr lang="en-US" sz="1350" dirty="0">
-                <a:latin typeface="Calibri" pitchFamily="34" charset="0"/>
-                <a:ea typeface="Calibri" pitchFamily="34" charset="-122"/>
-                <a:cs typeface="Calibri" pitchFamily="34" charset="-120"/>
-              </a:rPr>
-              <a:t>— % čitanja iz keša vs. sa diska</a:t>
-            </a:r>
-            <a:endParaRPr lang="en-US" sz="1350" dirty="0"/>
-          </a:p>
-        </p:txBody>
-      </p:sp>
-      <p:sp>
-        <p:nvSpPr>
-          <p:cNvPr id="14" name="Text 12"/>
-          <p:cNvSpPr/>
-          <p:nvPr/>
-        </p:nvSpPr>
-        <p:spPr>
-          <a:xfrm>
-            <a:off x="4919472" y="1645920"/>
-            <a:ext cx="3657600" cy="502920"/>
-          </a:xfrm>
-          <a:prstGeom prst="rect">
-            <a:avLst/>
-          </a:prstGeom>
-          <a:noFill/>
-          <a:ln/>
-        </p:spPr>
-        <p:txBody>
-          <a:bodyPr wrap="square" lIns="0" tIns="0" rIns="0" bIns="0" rtlCol="0" anchor="ctr"/>
-          <a:lstStyle/>
-          <a:p>
-            <a:pPr marL="0" indent="0">
-              <a:buNone/>
-            </a:pPr>
-            <a:r>
-              <a:rPr lang="en-US" sz="1350" b="1" dirty="0">
-                <a:solidFill>
-                  <a:srgbClr val="2B3A55"/>
-                </a:solidFill>
-                <a:latin typeface="Calibri" pitchFamily="34" charset="0"/>
-                <a:ea typeface="Calibri" pitchFamily="34" charset="-122"/>
-                <a:cs typeface="Calibri" pitchFamily="34" charset="-120"/>
-              </a:rPr>
-              <a:t>Zaključavanja (locks)  </a:t>
-            </a:r>
-            <a:r>
-              <a:rPr lang="en-US" sz="1350" dirty="0">
-                <a:latin typeface="Calibri" pitchFamily="34" charset="0"/>
-                <a:ea typeface="Calibri" pitchFamily="34" charset="-122"/>
-                <a:cs typeface="Calibri" pitchFamily="34" charset="-120"/>
-              </a:rPr>
-              <a:t>— sesije koje čekaju na bravu</a:t>
-            </a:r>
-            <a:endParaRPr lang="en-US" sz="1350" dirty="0"/>
-          </a:p>
-        </p:txBody>
-      </p:sp>
-      <p:sp>
-        <p:nvSpPr>
-          <p:cNvPr id="16" name="Text 14"/>
-          <p:cNvSpPr/>
-          <p:nvPr/>
-        </p:nvSpPr>
-        <p:spPr>
-          <a:xfrm>
-            <a:off x="4919472" y="2359152"/>
-            <a:ext cx="3657600" cy="502920"/>
-          </a:xfrm>
-          <a:prstGeom prst="rect">
-            <a:avLst/>
-          </a:prstGeom>
-          <a:noFill/>
-          <a:ln/>
-        </p:spPr>
-        <p:txBody>
-          <a:bodyPr wrap="square" lIns="0" tIns="0" rIns="0" bIns="0" rtlCol="0" anchor="ctr"/>
-          <a:lstStyle/>
-          <a:p>
-            <a:pPr marL="0" indent="0">
-              <a:buNone/>
-            </a:pPr>
-            <a:r>
-              <a:rPr lang="en-US" sz="1350" b="1" dirty="0">
-                <a:solidFill>
-                  <a:srgbClr val="2B3A55"/>
-                </a:solidFill>
-                <a:latin typeface="Calibri" pitchFamily="34" charset="0"/>
-                <a:ea typeface="Calibri" pitchFamily="34" charset="-122"/>
-                <a:cs typeface="Calibri" pitchFamily="34" charset="-120"/>
-              </a:rPr>
-              <a:t>Kašnjenje replikacije  </a:t>
-            </a:r>
-            <a:r>
-              <a:rPr lang="en-US" sz="1350" dirty="0">
-                <a:latin typeface="Calibri" pitchFamily="34" charset="0"/>
-                <a:ea typeface="Calibri" pitchFamily="34" charset="-122"/>
-                <a:cs typeface="Calibri" pitchFamily="34" charset="-120"/>
-              </a:rPr>
-              <a:t>— razlika primarni ↔ replika</a:t>
-            </a:r>
-            <a:endParaRPr lang="en-US" sz="1350" dirty="0"/>
-          </a:p>
-        </p:txBody>
-      </p:sp>
-      <p:sp>
-        <p:nvSpPr>
-          <p:cNvPr id="18" name="Text 16"/>
-          <p:cNvSpPr/>
-          <p:nvPr/>
-        </p:nvSpPr>
-        <p:spPr>
-          <a:xfrm>
-            <a:off x="4919472" y="3072384"/>
-            <a:ext cx="3657600" cy="502920"/>
-          </a:xfrm>
-          <a:prstGeom prst="rect">
-            <a:avLst/>
-          </a:prstGeom>
-          <a:noFill/>
-          <a:ln/>
-        </p:spPr>
-        <p:txBody>
-          <a:bodyPr wrap="square" lIns="0" tIns="0" rIns="0" bIns="0" rtlCol="0" anchor="ctr"/>
-          <a:lstStyle/>
-          <a:p>
-            <a:pPr marL="0" indent="0">
-              <a:buNone/>
-            </a:pPr>
-            <a:r>
-              <a:rPr lang="en-US" sz="1350" b="1" dirty="0">
-                <a:solidFill>
-                  <a:srgbClr val="2B3A55"/>
-                </a:solidFill>
-                <a:latin typeface="Calibri" pitchFamily="34" charset="0"/>
-                <a:ea typeface="Calibri" pitchFamily="34" charset="-122"/>
-                <a:cs typeface="Calibri" pitchFamily="34" charset="-120"/>
-              </a:rPr>
-              <a:t>Stopa grešaka  </a:t>
-            </a:r>
-            <a:r>
-              <a:rPr lang="en-US" sz="1350" dirty="0">
-                <a:latin typeface="Calibri" pitchFamily="34" charset="0"/>
-                <a:ea typeface="Calibri" pitchFamily="34" charset="-122"/>
-                <a:cs typeface="Calibri" pitchFamily="34" charset="-120"/>
-              </a:rPr>
-              <a:t>— neuspele transakcije, deadlock-ovi</a:t>
-            </a:r>
-            <a:endParaRPr lang="en-US" sz="1350" dirty="0"/>
           </a:p>
         </p:txBody>
       </p:sp>

--- a/P3/Monitoring_PostgreSQL_prezentacija.pptx
+++ b/P3/Monitoring_PostgreSQL_prezentacija.pptx
@@ -3652,7 +3652,31 @@
                 <a:ea typeface="Calibri" pitchFamily="34" charset="-122"/>
                 <a:cs typeface="Calibri" pitchFamily="34" charset="-120"/>
               </a:rPr>
-              <a:t>Identifikuje najskuplje upite bez znanja o kodu aplikacije. Ograničenje: agregira po normalizovanom obliku, pa spajanje sporog i brzog poziva sakriva promenu plana.</a:t>
+              <a:t>Identifikuje najskuplje upite bez znanja o kodu aplikacije. Ograničenje: </a:t>
+            </a:r>
+            <a:r>
+              <a:rPr lang="en-US" sz="1350" dirty="0" err="1">
+                <a:latin typeface="Calibri" pitchFamily="34" charset="0"/>
+                <a:ea typeface="Calibri" pitchFamily="34" charset="-122"/>
+                <a:cs typeface="Calibri" pitchFamily="34" charset="-120"/>
+              </a:rPr>
+              <a:t>gru</a:t>
+            </a:r>
+            <a:r>
+              <a:rPr lang="sr-Latn-RS" sz="1350" dirty="0">
+                <a:latin typeface="Calibri" pitchFamily="34" charset="0"/>
+                <a:ea typeface="Calibri" pitchFamily="34" charset="-122"/>
+                <a:cs typeface="Calibri" pitchFamily="34" charset="-120"/>
+              </a:rPr>
+              <a:t>piše</a:t>
+            </a:r>
+            <a:r>
+              <a:rPr lang="en-US" sz="1350" dirty="0">
+                <a:latin typeface="Calibri" pitchFamily="34" charset="0"/>
+                <a:ea typeface="Calibri" pitchFamily="34" charset="-122"/>
+                <a:cs typeface="Calibri" pitchFamily="34" charset="-120"/>
+              </a:rPr>
+              <a:t> po normalizovanom obliku, pa spajanje sporog i brzog poziva sakriva promenu plana.</a:t>
             </a:r>
             <a:endParaRPr lang="en-US" sz="1350" dirty="0"/>
           </a:p>
@@ -5101,7 +5125,7 @@
         </p:nvSpPr>
         <p:spPr>
           <a:xfrm>
-            <a:off x="548640" y="3977640"/>
+            <a:off x="548640" y="4137660"/>
             <a:ext cx="8046720" cy="502920"/>
           </a:xfrm>
           <a:prstGeom prst="rect">
@@ -5156,7 +5180,87 @@
                 <a:ea typeface="Calibri" pitchFamily="34" charset="-122"/>
                 <a:cs typeface="Calibri" pitchFamily="34" charset="-120"/>
               </a:rPr>
-              <a:t> je posebno bitna u distribuiranim sistemima, gde broj mogućih otkaza raste eksponencijalno.</a:t>
+              <a:t> je posebno bitna u distribuiranim sistemima, gde broj mogućih otkaza </a:t>
+            </a:r>
+            <a:r>
+              <a:rPr lang="en-US" sz="1300" dirty="0" err="1">
+                <a:latin typeface="Calibri" pitchFamily="34" charset="0"/>
+                <a:ea typeface="Calibri" pitchFamily="34" charset="-122"/>
+                <a:cs typeface="Calibri" pitchFamily="34" charset="-120"/>
+              </a:rPr>
+              <a:t>raste</a:t>
+            </a:r>
+            <a:r>
+              <a:rPr lang="en-US" sz="1300" dirty="0">
+                <a:latin typeface="Calibri" pitchFamily="34" charset="0"/>
+                <a:ea typeface="Calibri" pitchFamily="34" charset="-122"/>
+                <a:cs typeface="Calibri" pitchFamily="34" charset="-120"/>
+              </a:rPr>
+              <a:t> </a:t>
+            </a:r>
+            <a:r>
+              <a:rPr lang="en-US" sz="1300" dirty="0" err="1">
+                <a:latin typeface="Calibri" pitchFamily="34" charset="0"/>
+                <a:ea typeface="Calibri" pitchFamily="34" charset="-122"/>
+                <a:cs typeface="Calibri" pitchFamily="34" charset="-120"/>
+              </a:rPr>
+              <a:t>eksponencijalno</a:t>
+            </a:r>
+            <a:r>
+              <a:rPr lang="en-US" sz="1300" dirty="0">
+                <a:latin typeface="Calibri" pitchFamily="34" charset="0"/>
+                <a:ea typeface="Calibri" pitchFamily="34" charset="-122"/>
+                <a:cs typeface="Calibri" pitchFamily="34" charset="-120"/>
+              </a:rPr>
+              <a:t> </a:t>
+            </a:r>
+            <a:r>
+              <a:rPr lang="en-US" sz="1300" dirty="0" err="1">
+                <a:latin typeface="Calibri" pitchFamily="34" charset="0"/>
+                <a:ea typeface="Calibri" pitchFamily="34" charset="-122"/>
+                <a:cs typeface="Calibri" pitchFamily="34" charset="-120"/>
+              </a:rPr>
+              <a:t>sa</a:t>
+            </a:r>
+            <a:r>
+              <a:rPr lang="en-US" sz="1300" dirty="0">
+                <a:latin typeface="Calibri" pitchFamily="34" charset="0"/>
+                <a:ea typeface="Calibri" pitchFamily="34" charset="-122"/>
+                <a:cs typeface="Calibri" pitchFamily="34" charset="-120"/>
+              </a:rPr>
+              <a:t> </a:t>
+            </a:r>
+            <a:r>
+              <a:rPr lang="en-US" sz="1300" dirty="0" err="1">
+                <a:latin typeface="Calibri" pitchFamily="34" charset="0"/>
+                <a:ea typeface="Calibri" pitchFamily="34" charset="-122"/>
+                <a:cs typeface="Calibri" pitchFamily="34" charset="-120"/>
+              </a:rPr>
+              <a:t>brojem</a:t>
+            </a:r>
+            <a:r>
+              <a:rPr lang="en-US" sz="1300" dirty="0">
+                <a:latin typeface="Calibri" pitchFamily="34" charset="0"/>
+                <a:ea typeface="Calibri" pitchFamily="34" charset="-122"/>
+                <a:cs typeface="Calibri" pitchFamily="34" charset="-120"/>
+              </a:rPr>
+              <a:t> </a:t>
+            </a:r>
+            <a:r>
+              <a:rPr lang="sr-Latn-RS" sz="1300" dirty="0">
+                <a:latin typeface="Calibri" pitchFamily="34" charset="0"/>
+                <a:ea typeface="Calibri" pitchFamily="34" charset="-122"/>
+                <a:cs typeface="Calibri" pitchFamily="34" charset="-120"/>
+              </a:rPr>
+              <a:t>čvorova</a:t>
+            </a:r>
+            <a:r>
+              <a:rPr lang="en-US" sz="1300" dirty="0">
+                <a:latin typeface="Calibri" pitchFamily="34" charset="0"/>
+                <a:ea typeface="Calibri" pitchFamily="34" charset="-122"/>
+                <a:cs typeface="Calibri" pitchFamily="34" charset="-120"/>
+              </a:rPr>
+              <a:t>.</a:t>
             </a:r>
             <a:endParaRPr lang="en-US" sz="1300" dirty="0"/>
           </a:p>
@@ -5773,7 +5877,55 @@
                 <a:ea typeface="Calibri" pitchFamily="34" charset="-122"/>
                 <a:cs typeface="Calibri" pitchFamily="34" charset="-120"/>
               </a:rPr>
-              <a:t>Bez obzira na konkretan DBMS, prati se sličan skup kategorija — na nivou servera i na nivou samog DBMS-a:</a:t>
+              <a:t>Bez obzira na konkretan DBMS, prati se sličan </a:t>
+            </a:r>
+            <a:r>
+              <a:rPr lang="en-US" sz="1400" dirty="0" err="1">
+                <a:latin typeface="Calibri" pitchFamily="34" charset="0"/>
+                <a:ea typeface="Calibri" pitchFamily="34" charset="-122"/>
+                <a:cs typeface="Calibri" pitchFamily="34" charset="-120"/>
+              </a:rPr>
+              <a:t>skup</a:t>
+            </a:r>
+            <a:r>
+              <a:rPr lang="en-US" sz="1400" dirty="0">
+                <a:latin typeface="Calibri" pitchFamily="34" charset="0"/>
+                <a:ea typeface="Calibri" pitchFamily="34" charset="-122"/>
+                <a:cs typeface="Calibri" pitchFamily="34" charset="-120"/>
+              </a:rPr>
+              <a:t> </a:t>
+            </a:r>
+            <a:r>
+              <a:rPr lang="en-US" sz="1400" dirty="0" err="1">
+                <a:latin typeface="Calibri" pitchFamily="34" charset="0"/>
+                <a:ea typeface="Calibri" pitchFamily="34" charset="-122"/>
+                <a:cs typeface="Calibri" pitchFamily="34" charset="-120"/>
+              </a:rPr>
+              <a:t>kategorija</a:t>
+            </a:r>
+            <a:r>
+              <a:rPr lang="en-US" sz="1400" dirty="0">
+                <a:latin typeface="Calibri" pitchFamily="34" charset="0"/>
+                <a:ea typeface="Calibri" pitchFamily="34" charset="-122"/>
+                <a:cs typeface="Calibri" pitchFamily="34" charset="-120"/>
+              </a:rPr>
+              <a:t> </a:t>
+            </a:r>
+            <a:r>
+              <a:rPr lang="en-US" sz="1400" dirty="0" err="1">
+                <a:latin typeface="Calibri" pitchFamily="34" charset="0"/>
+                <a:ea typeface="Calibri" pitchFamily="34" charset="-122"/>
+                <a:cs typeface="Calibri" pitchFamily="34" charset="-120"/>
+              </a:rPr>
+              <a:t>metrika</a:t>
+            </a:r>
+            <a:r>
+              <a:rPr lang="en-US" sz="1400" dirty="0">
+                <a:latin typeface="Calibri" pitchFamily="34" charset="0"/>
+                <a:ea typeface="Calibri" pitchFamily="34" charset="-122"/>
+                <a:cs typeface="Calibri" pitchFamily="34" charset="-120"/>
+              </a:rPr>
+              <a:t>:</a:t>
             </a:r>
             <a:endParaRPr lang="en-US" sz="1400" dirty="0"/>
           </a:p>
